--- a/materials/presentation_drafts/presentation_draft.pptx
+++ b/materials/presentation_drafts/presentation_draft.pptx
@@ -3178,8 +3178,8 @@
               <a:buNone/>
             </a:pPr>
             <a:r>
-              <a:rPr lang="ja-JP" altLang="en-US" b="1" dirty="0"/>
-              <a:t>高橋　朋子　プレゼンテーション</a:t>
+              <a:rPr lang="ja-JP" altLang="en-US" b="1"/>
+              <a:t>プレゼンテーション</a:t>
             </a:r>
             <a:endParaRPr lang="en-US" b="1" dirty="0"/>
           </a:p>
